--- a/MCG_Agentic_Data_Engineering.pptx
+++ b/MCG_Agentic_Data_Engineering.pptx
@@ -8429,9 +8429,9 @@
                 <a:solidFill>
                   <a:srgbClr val="10CFC9"/>
                 </a:solidFill>
-                <a:latin typeface="Consolas" pitchFamily="34" charset="0"/>
-                <a:ea typeface="Consolas" pitchFamily="34" charset="-122"/>
-                <a:cs typeface="Consolas" pitchFamily="34" charset="-120"/>
+                <a:latin typeface="Inter" pitchFamily="34" charset="0"/>
+                <a:ea typeface="Inter" pitchFamily="34" charset="-122"/>
+                <a:cs typeface="Inter" pitchFamily="34" charset="-120"/>
               </a:rPr>
               <a:t>git diff — mcg-batch-pipeline / crm-landing</a:t>
             </a:r>
@@ -8468,9 +8468,9 @@
                 <a:solidFill>
                   <a:srgbClr val="D0D4D7"/>
                 </a:solidFill>
-                <a:latin typeface="Consolas" pitchFamily="34" charset="0"/>
-                <a:ea typeface="Consolas" pitchFamily="34" charset="-122"/>
-                <a:cs typeface="Consolas" pitchFamily="34" charset="-120"/>
+                <a:latin typeface="Inter" pitchFamily="34" charset="0"/>
+                <a:ea typeface="Inter" pitchFamily="34" charset="-122"/>
+                <a:cs typeface="Inter" pitchFamily="34" charset="-120"/>
               </a:rPr>
               <a:t>  task: MCG CRM Landing</a:t>
             </a:r>
@@ -8507,9 +8507,9 @@
                 <a:solidFill>
                   <a:srgbClr val="D0D4D7"/>
                 </a:solidFill>
-                <a:latin typeface="Consolas" pitchFamily="34" charset="0"/>
-                <a:ea typeface="Consolas" pitchFamily="34" charset="-122"/>
-                <a:cs typeface="Consolas" pitchFamily="34" charset="-120"/>
+                <a:latin typeface="Inter" pitchFamily="34" charset="0"/>
+                <a:ea typeface="Inter" pitchFamily="34" charset="-122"/>
+                <a:cs typeface="Inter" pitchFamily="34" charset="-120"/>
               </a:rPr>
               <a:t>  schedule:</a:t>
             </a:r>
@@ -8546,9 +8546,9 @@
                 <a:solidFill>
                   <a:srgbClr val="A9B3B6"/>
                 </a:solidFill>
-                <a:latin typeface="Consolas" pitchFamily="34" charset="0"/>
-                <a:ea typeface="Consolas" pitchFamily="34" charset="-122"/>
-                <a:cs typeface="Consolas" pitchFamily="34" charset="-120"/>
+                <a:latin typeface="Inter" pitchFamily="34" charset="0"/>
+                <a:ea typeface="Inter" pitchFamily="34" charset="-122"/>
+                <a:cs typeface="Inter" pitchFamily="34" charset="-120"/>
               </a:rPr>
               <a:t>-   rrule: FREQ=MINUTELY;INTERVAL=15</a:t>
             </a:r>
@@ -8585,9 +8585,9 @@
                 <a:solidFill>
                   <a:srgbClr val="10CFC9"/>
                 </a:solidFill>
-                <a:latin typeface="Consolas" pitchFamily="34" charset="0"/>
-                <a:ea typeface="Consolas" pitchFamily="34" charset="-122"/>
-                <a:cs typeface="Consolas" pitchFamily="34" charset="-120"/>
+                <a:latin typeface="Inter" pitchFamily="34" charset="0"/>
+                <a:ea typeface="Inter" pitchFamily="34" charset="-122"/>
+                <a:cs typeface="Inter" pitchFamily="34" charset="-120"/>
               </a:rPr>
               <a:t>+   rrule: FREQ=MINUTELY;INTERVAL=30</a:t>
             </a:r>
@@ -13503,9 +13503,9 @@
                 <a:solidFill>
                   <a:srgbClr val="FFFFFF"/>
                 </a:solidFill>
-                <a:latin typeface="Consolas" pitchFamily="34" charset="0"/>
-                <a:ea typeface="Consolas" pitchFamily="34" charset="-122"/>
-                <a:cs typeface="Consolas" pitchFamily="34" charset="-120"/>
+                <a:latin typeface="Inter" pitchFamily="34" charset="0"/>
+                <a:ea typeface="Inter" pitchFamily="34" charset="-122"/>
+                <a:cs typeface="Inter" pitchFamily="34" charset="-120"/>
               </a:rPr>
               <a:t>pipeline.yaml</a:t>
             </a:r>

--- a/MCG_Agentic_Data_Engineering.pptx
+++ b/MCG_Agentic_Data_Engineering.pptx
@@ -2251,7 +2251,7 @@
         <p:spPr>
           <a:xfrm>
             <a:off x="457200" y="365760"/>
-            <a:ext cx="1280160" cy="566928"/>
+            <a:ext cx="1024128" cy="566928"/>
           </a:xfrm>
           <a:prstGeom prst="rect">
             <a:avLst/>
@@ -3030,7 +3030,7 @@
         <p:spPr>
           <a:xfrm>
             <a:off x="457200" y="6492240"/>
-            <a:ext cx="640080" cy="274320"/>
+            <a:ext cx="493776" cy="274320"/>
           </a:xfrm>
           <a:prstGeom prst="rect">
             <a:avLst/>
@@ -3930,7 +3930,7 @@
         <p:spPr>
           <a:xfrm>
             <a:off x="457200" y="6492240"/>
-            <a:ext cx="640080" cy="274320"/>
+            <a:ext cx="493776" cy="274320"/>
           </a:xfrm>
           <a:prstGeom prst="rect">
             <a:avLst/>
@@ -4830,7 +4830,7 @@
         <p:spPr>
           <a:xfrm>
             <a:off x="457200" y="6492240"/>
-            <a:ext cx="640080" cy="274320"/>
+            <a:ext cx="493776" cy="274320"/>
           </a:xfrm>
           <a:prstGeom prst="rect">
             <a:avLst/>
@@ -6314,7 +6314,7 @@
         <p:spPr>
           <a:xfrm>
             <a:off x="457200" y="6492240"/>
-            <a:ext cx="640080" cy="274320"/>
+            <a:ext cx="493776" cy="274320"/>
           </a:xfrm>
           <a:prstGeom prst="rect">
             <a:avLst/>
@@ -7644,7 +7644,7 @@
         <p:spPr>
           <a:xfrm>
             <a:off x="457200" y="6492240"/>
-            <a:ext cx="640080" cy="274320"/>
+            <a:ext cx="493776" cy="274320"/>
           </a:xfrm>
           <a:prstGeom prst="rect">
             <a:avLst/>
@@ -8787,7 +8787,7 @@
         <p:spPr>
           <a:xfrm>
             <a:off x="457200" y="6492240"/>
-            <a:ext cx="640080" cy="274320"/>
+            <a:ext cx="493776" cy="274320"/>
           </a:xfrm>
           <a:prstGeom prst="rect">
             <a:avLst/>
@@ -9853,7 +9853,7 @@
         <p:spPr>
           <a:xfrm>
             <a:off x="457200" y="365760"/>
-            <a:ext cx="1280160" cy="566928"/>
+            <a:ext cx="1024128" cy="566928"/>
           </a:xfrm>
           <a:prstGeom prst="rect">
             <a:avLst/>
@@ -10740,7 +10740,7 @@
         <p:spPr>
           <a:xfrm>
             <a:off x="457200" y="6492240"/>
-            <a:ext cx="640080" cy="274320"/>
+            <a:ext cx="493776" cy="274320"/>
           </a:xfrm>
           <a:prstGeom prst="rect">
             <a:avLst/>
@@ -11229,7 +11229,7 @@
         <p:spPr>
           <a:xfrm>
             <a:off x="457200" y="6492240"/>
-            <a:ext cx="640080" cy="274320"/>
+            <a:ext cx="493776" cy="274320"/>
           </a:xfrm>
           <a:prstGeom prst="rect">
             <a:avLst/>
@@ -12303,7 +12303,7 @@
         <p:spPr>
           <a:xfrm>
             <a:off x="457200" y="6492240"/>
-            <a:ext cx="640080" cy="274320"/>
+            <a:ext cx="493776" cy="274320"/>
           </a:xfrm>
           <a:prstGeom prst="rect">
             <a:avLst/>
@@ -13282,7 +13282,7 @@
         <p:spPr>
           <a:xfrm>
             <a:off x="457200" y="6492240"/>
-            <a:ext cx="640080" cy="274320"/>
+            <a:ext cx="493776" cy="274320"/>
           </a:xfrm>
           <a:prstGeom prst="rect">
             <a:avLst/>
@@ -14311,7 +14311,7 @@
         <p:spPr>
           <a:xfrm>
             <a:off x="457200" y="6492240"/>
-            <a:ext cx="640080" cy="274320"/>
+            <a:ext cx="493776" cy="274320"/>
           </a:xfrm>
           <a:prstGeom prst="rect">
             <a:avLst/>
@@ -15253,7 +15253,7 @@
         <p:spPr>
           <a:xfrm>
             <a:off x="457200" y="6492240"/>
-            <a:ext cx="640080" cy="274320"/>
+            <a:ext cx="493776" cy="274320"/>
           </a:xfrm>
           <a:prstGeom prst="rect">
             <a:avLst/>
@@ -16195,7 +16195,7 @@
         <p:spPr>
           <a:xfrm>
             <a:off x="457200" y="6492240"/>
-            <a:ext cx="640080" cy="274320"/>
+            <a:ext cx="493776" cy="274320"/>
           </a:xfrm>
           <a:prstGeom prst="rect">
             <a:avLst/>
@@ -17137,7 +17137,7 @@
         <p:spPr>
           <a:xfrm>
             <a:off x="457200" y="6492240"/>
-            <a:ext cx="640080" cy="274320"/>
+            <a:ext cx="493776" cy="274320"/>
           </a:xfrm>
           <a:prstGeom prst="rect">
             <a:avLst/>

--- a/MCG_Agentic_Data_Engineering.pptx
+++ b/MCG_Agentic_Data_Engineering.pptx
@@ -3690,7 +3690,7 @@
                 <a:ea typeface="Inter" pitchFamily="34" charset="-122"/>
                 <a:cs typeface="Inter" pitchFamily="34" charset="-120"/>
               </a:rPr>
-              <a:t>▸  Existing Talend job: Salesforce address validation + Nominatim geocoding + Qlik Stewardship routing</a:t>
+              <a:t>▸  Existing Talend job mcg_sf_address_validate_bulk: address standardization, bulk geocoding, GPS routing gate to Iceberg or a Stewardship sprint</a:t>
             </a:r>
             <a:endParaRPr lang="en-US" sz="1100" dirty="0"/>
           </a:p>

--- a/MCG_Agentic_Data_Engineering.pptx
+++ b/MCG_Agentic_Data_Engineering.pptx
@@ -3690,7 +3690,7 @@
                 <a:ea typeface="Inter" pitchFamily="34" charset="-122"/>
                 <a:cs typeface="Inter" pitchFamily="34" charset="-120"/>
               </a:rPr>
-              <a:t>▸  Existing Talend job mcg_sf_address_validate_bulk: address standardization, bulk geocoding, GPS routing gate to Iceberg or a Stewardship sprint</a:t>
+              <a:t>▸  Existing Talend job mcg_crm_address_validate_bulk: address standardization, bulk geocoding, GPS routing gate to Iceberg or a Stewardship sprint</a:t>
             </a:r>
             <a:endParaRPr lang="en-US" sz="1100" dirty="0"/>
           </a:p>
